--- a/dist/초3/수학/도형과측정/초3_수학_도형과측정_06_들이_학생용.pptx
+++ b/dist/초3/수학/도형과측정/초3_수학_도형과측정_06_들이_학생용.pptx
@@ -121,13 +121,13 @@
   <p:extLst>
     <p:ext uri="{521415D9-36F7-43E2-AB2F-B90AF26B5E84}">
       <p14:sectionLst xmlns:p14="http://schemas.microsoft.com/office/powerpoint/2010/main">
-        <p14:section name="도입" id="{125fe3f8-816e-757d-aaf6-954f751218b2}">
+        <p14:section name="도입" id="{883cc341-0535-367d-172e-6619653eedce}">
           <p14:sldIdLst>
             <p14:sldId id="256"/>
             <p14:sldId id="257"/>
           </p14:sldIdLst>
         </p14:section>
-        <p14:section name="개념" id="{ea027525-caa6-ffde-fbd2-d5aff549cefe}">
+        <p14:section name="개념" id="{dae44623-5df0-bfdb-c004-a2be33ed1a86}">
           <p14:sldIdLst>
             <p14:sldId id="258"/>
             <p14:sldId id="259"/>
@@ -137,31 +137,31 @@
             <p14:sldId id="265"/>
           </p14:sldIdLst>
         </p14:section>
-        <p14:section name="연습" id="{b31624ba-46e0-cf77-c774-53298405d3cb}">
+        <p14:section name="연습" id="{4e262e48-6c8b-20d1-466f-63d4d6332dee}">
           <p14:sldIdLst>
             <p14:sldId id="262"/>
             <p14:sldId id="263"/>
             <p14:sldId id="266"/>
           </p14:sldIdLst>
         </p14:section>
-        <p14:section name="개념" id="{4c29ea2a-3859-a17a-2e72-4f455fe7d2ef}">
+        <p14:section name="개념" id="{0fb8d7cb-3d37-50bf-7ae6-d38899889ab0}">
           <p14:sldIdLst/>
         </p14:section>
-        <p14:section name="연습" id="{86a77a1f-17ee-f9eb-3733-97e5049b6b8d}">
+        <p14:section name="연습" id="{bd75db79-d499-cf89-b15a-88aee641c6a4}">
           <p14:sldIdLst/>
         </p14:section>
-        <p14:section name="확인" id="{6d06bc9e-d479-7c02-3245-bbb299a84553}">
+        <p14:section name="확인" id="{f2bad586-732b-8c44-bc6e-001eb6da2ff6}">
           <p14:sldIdLst>
             <p14:sldId id="267"/>
             <p14:sldId id="268"/>
           </p14:sldIdLst>
         </p14:section>
-        <p14:section name="정리" id="{387c2f44-decc-aa81-ece7-113f900385aa}">
+        <p14:section name="정리" id="{aad079a3-bbdb-0e33-4dde-33c542613cb3}">
           <p14:sldIdLst>
             <p14:sldId id="269"/>
           </p14:sldIdLst>
         </p14:section>
-        <p14:section name="보충" id="{259c41e6-a270-bfc3-e562-a8fb36a3e2e5}">
+        <p14:section name="보충" id="{a87591cb-19da-42b1-8ba5-5e0495f53a86}">
           <p14:sldIdLst>
             <p14:sldId id="270"/>
           </p14:sldIdLst>
@@ -3294,8 +3294,8 @@
         </p:nvSpPr>
         <p:spPr>
           <a:xfrm>
-            <a:off x="10512014" y="2059577"/>
-            <a:ext cx="1185672" cy="381000"/>
+            <a:off x="10476962" y="2059577"/>
+            <a:ext cx="1255776" cy="381000"/>
           </a:xfrm>
           <a:prstGeom prst="rect">
             <a:avLst/>
@@ -3311,7 +3311,7 @@
               <a:buNone/>
             </a:pPr>
             <a:r>
-              <a:rPr lang="ko-KR" altLang="en-US" sz="2400" b="1" dirty="0">
+              <a:rPr lang="en-US" altLang="ko-KR" sz="2400" b="1" dirty="0">
                 <a:solidFill>
                   <a:srgbClr val="1F2937"/>
                 </a:solidFill>
@@ -3333,8 +3333,8 @@
         </p:nvSpPr>
         <p:spPr>
           <a:xfrm>
-            <a:off x="10514227" y="834934"/>
-            <a:ext cx="627888" cy="381000"/>
+            <a:off x="10526419" y="834934"/>
+            <a:ext cx="603504" cy="381000"/>
           </a:xfrm>
           <a:prstGeom prst="rect">
             <a:avLst/>
@@ -3350,7 +3350,7 @@
               <a:buNone/>
             </a:pPr>
             <a:r>
-              <a:rPr lang="ko-KR" altLang="en-US" sz="2400" b="1" dirty="0">
+              <a:rPr lang="en-US" altLang="ko-KR" sz="2400" b="1" dirty="0">
                 <a:solidFill>
                   <a:srgbClr val="1F2937"/>
                 </a:solidFill>
@@ -4919,7 +4919,7 @@
               <a:buNone/>
             </a:pPr>
             <a:r>
-              <a:rPr lang="ko-KR" altLang="en-US" sz="3000" dirty="0">
+              <a:rPr lang="en-US" altLang="ko-KR" sz="3000" dirty="0">
                 <a:solidFill>
                   <a:srgbClr val="1F2937"/>
                 </a:solidFill>
@@ -6222,7 +6222,7 @@
               <a:buNone/>
             </a:pPr>
             <a:r>
-              <a:rPr lang="ko-KR" altLang="en-US" sz="3000" b="1" dirty="0">
+              <a:rPr lang="en-US" altLang="ko-KR" sz="3000" b="1" dirty="0">
                 <a:solidFill>
                   <a:srgbClr val="1F2937"/>
                 </a:solidFill>
@@ -6239,7 +6239,7 @@
               <a:buNone/>
             </a:pPr>
             <a:r>
-              <a:rPr lang="ko-KR" altLang="en-US" sz="3000" b="1" dirty="0">
+              <a:rPr lang="en-US" altLang="ko-KR" sz="3000" b="1" dirty="0">
                 <a:solidFill>
                   <a:srgbClr val="1F2937"/>
                 </a:solidFill>
@@ -6325,7 +6325,7 @@
               <a:buNone/>
             </a:pPr>
             <a:r>
-              <a:rPr lang="ko-KR" altLang="en-US" sz="3000" b="1" dirty="0">
+              <a:rPr lang="en-US" altLang="ko-KR" sz="3000" b="1" dirty="0">
                 <a:solidFill>
                   <a:srgbClr val="1F2937"/>
                 </a:solidFill>
@@ -6342,7 +6342,7 @@
               <a:buNone/>
             </a:pPr>
             <a:r>
-              <a:rPr lang="ko-KR" altLang="en-US" sz="3000" b="1" dirty="0">
+              <a:rPr lang="en-US" altLang="ko-KR" sz="3000" b="1" dirty="0">
                 <a:solidFill>
                   <a:srgbClr val="1F2937"/>
                 </a:solidFill>
@@ -6428,7 +6428,7 @@
               <a:buNone/>
             </a:pPr>
             <a:r>
-              <a:rPr lang="ko-KR" altLang="en-US" sz="3000" b="1" dirty="0">
+              <a:rPr lang="en-US" altLang="ko-KR" sz="3000" b="1" dirty="0">
                 <a:solidFill>
                   <a:srgbClr val="1F2937"/>
                 </a:solidFill>
@@ -6445,7 +6445,7 @@
               <a:buNone/>
             </a:pPr>
             <a:r>
-              <a:rPr lang="ko-KR" altLang="en-US" sz="3000" b="1" dirty="0">
+              <a:rPr lang="en-US" altLang="ko-KR" sz="3000" b="1" dirty="0">
                 <a:solidFill>
                   <a:srgbClr val="1F2937"/>
                 </a:solidFill>
@@ -6684,7 +6684,7 @@
               <a:buNone/>
             </a:pPr>
             <a:r>
-              <a:rPr lang="ko-KR" altLang="en-US" sz="3000" b="1" dirty="0">
+              <a:rPr lang="en-US" altLang="ko-KR" sz="3000" b="1" dirty="0">
                 <a:solidFill>
                   <a:srgbClr val="1F2937"/>
                 </a:solidFill>
@@ -6770,7 +6770,7 @@
               <a:buNone/>
             </a:pPr>
             <a:r>
-              <a:rPr lang="ko-KR" altLang="en-US" sz="3000" b="1" dirty="0">
+              <a:rPr lang="en-US" altLang="ko-KR" sz="3000" b="1" dirty="0">
                 <a:solidFill>
                   <a:srgbClr val="1F2937"/>
                 </a:solidFill>
@@ -6856,7 +6856,7 @@
               <a:buNone/>
             </a:pPr>
             <a:r>
-              <a:rPr lang="ko-KR" altLang="en-US" sz="3000" b="1" dirty="0">
+              <a:rPr lang="en-US" altLang="ko-KR" sz="3000" b="1" dirty="0">
                 <a:solidFill>
                   <a:srgbClr val="1F2937"/>
                 </a:solidFill>
@@ -6873,7 +6873,7 @@
               <a:buNone/>
             </a:pPr>
             <a:r>
-              <a:rPr lang="ko-KR" altLang="en-US" sz="3000" b="1" dirty="0">
+              <a:rPr lang="en-US" altLang="ko-KR" sz="3000" b="1" dirty="0">
                 <a:solidFill>
                   <a:srgbClr val="1F2937"/>
                 </a:solidFill>
@@ -6959,7 +6959,7 @@
               <a:buNone/>
             </a:pPr>
             <a:r>
-              <a:rPr lang="ko-KR" altLang="en-US" sz="3000" b="1" dirty="0">
+              <a:rPr lang="en-US" altLang="ko-KR" sz="3000" b="1" dirty="0">
                 <a:solidFill>
                   <a:srgbClr val="1F2937"/>
                 </a:solidFill>
@@ -6976,7 +6976,7 @@
               <a:buNone/>
             </a:pPr>
             <a:r>
-              <a:rPr lang="ko-KR" altLang="en-US" sz="3000" b="1" dirty="0">
+              <a:rPr lang="en-US" altLang="ko-KR" sz="3000" b="1" dirty="0">
                 <a:solidFill>
                   <a:srgbClr val="1F2937"/>
                 </a:solidFill>
@@ -7733,7 +7733,7 @@
               <a:buNone/>
             </a:pPr>
             <a:r>
-              <a:rPr lang="ko-KR" altLang="en-US" sz="2400" b="1" dirty="0">
+              <a:rPr lang="en-US" altLang="ko-KR" sz="2400" b="1" dirty="0">
                 <a:solidFill>
                   <a:srgbClr val="FFFFFF"/>
                 </a:solidFill>
@@ -7867,7 +7867,7 @@
               <a:buNone/>
             </a:pPr>
             <a:r>
-              <a:rPr lang="ko-KR" altLang="en-US" sz="2400" dirty="0">
+              <a:rPr lang="en-US" altLang="ko-KR" sz="2400" dirty="0">
                 <a:solidFill>
                   <a:srgbClr val="FFFFFF"/>
                 </a:solidFill>
@@ -8823,7 +8823,7 @@
               <a:buNone/>
             </a:pPr>
             <a:r>
-              <a:rPr lang="ko-KR" altLang="en-US" sz="3400" b="1" dirty="0">
+              <a:rPr lang="en-US" altLang="ko-KR" sz="3400" b="1" dirty="0">
                 <a:solidFill>
                   <a:srgbClr val="1F2937"/>
                 </a:solidFill>
@@ -9131,7 +9131,7 @@
               <a:buNone/>
             </a:pPr>
             <a:r>
-              <a:rPr lang="ko-KR" altLang="en-US" sz="3000" b="1" dirty="0">
+              <a:rPr lang="en-US" altLang="ko-KR" sz="3000" b="1" dirty="0">
                 <a:solidFill>
                   <a:srgbClr val="1F2937"/>
                 </a:solidFill>
@@ -9190,7 +9190,7 @@
               <a:buNone/>
             </a:pPr>
             <a:r>
-              <a:rPr lang="ko-KR" altLang="en-US" sz="5400" b="1" dirty="0">
+              <a:rPr lang="en-US" altLang="ko-KR" sz="5400" b="1" dirty="0">
                 <a:solidFill>
                   <a:srgbClr val="1F2937"/>
                 </a:solidFill>
@@ -9268,7 +9268,7 @@
               <a:buNone/>
             </a:pPr>
             <a:r>
-              <a:rPr lang="ko-KR" altLang="en-US" sz="5400" b="1" dirty="0">
+              <a:rPr lang="en-US" altLang="ko-KR" sz="5400" b="1" dirty="0">
                 <a:solidFill>
                   <a:srgbClr val="1F2937"/>
                 </a:solidFill>
@@ -9490,7 +9490,7 @@
               <a:buNone/>
             </a:pPr>
             <a:r>
-              <a:rPr lang="ko-KR" altLang="en-US" sz="3000" b="1" dirty="0">
+              <a:rPr lang="en-US" altLang="ko-KR" sz="3000" b="1" dirty="0">
                 <a:solidFill>
                   <a:srgbClr val="1F2937"/>
                 </a:solidFill>
@@ -10081,8 +10081,8 @@
         </p:nvSpPr>
         <p:spPr>
           <a:xfrm>
-            <a:off x="3530636" y="2937726"/>
-            <a:ext cx="627888" cy="381000"/>
+            <a:off x="3542828" y="2937726"/>
+            <a:ext cx="603504" cy="381000"/>
           </a:xfrm>
           <a:prstGeom prst="rect">
             <a:avLst/>
@@ -10098,7 +10098,7 @@
               <a:buNone/>
             </a:pPr>
             <a:r>
-              <a:rPr lang="ko-KR" altLang="en-US" sz="2400" b="1" dirty="0">
+              <a:rPr lang="en-US" altLang="ko-KR" sz="2400" b="1" dirty="0">
                 <a:solidFill>
                   <a:srgbClr val="1F2937"/>
                 </a:solidFill>
@@ -10120,8 +10120,8 @@
         </p:nvSpPr>
         <p:spPr>
           <a:xfrm>
-            <a:off x="3530636" y="1410131"/>
-            <a:ext cx="627888" cy="381000"/>
+            <a:off x="3542828" y="1410131"/>
+            <a:ext cx="603504" cy="381000"/>
           </a:xfrm>
           <a:prstGeom prst="rect">
             <a:avLst/>
@@ -10137,7 +10137,7 @@
               <a:buNone/>
             </a:pPr>
             <a:r>
-              <a:rPr lang="ko-KR" altLang="en-US" sz="2400" b="1" dirty="0">
+              <a:rPr lang="en-US" altLang="ko-KR" sz="2400" b="1" dirty="0">
                 <a:solidFill>
                   <a:srgbClr val="1F2937"/>
                 </a:solidFill>
@@ -10566,7 +10566,7 @@
               <a:buNone/>
             </a:pPr>
             <a:r>
-              <a:rPr lang="ko-KR" altLang="en-US" sz="3000" dirty="0">
+              <a:rPr lang="en-US" altLang="ko-KR" sz="3000" dirty="0">
                 <a:solidFill>
                   <a:srgbClr val="1F2937"/>
                 </a:solidFill>
@@ -10928,8 +10928,8 @@
         </p:nvSpPr>
         <p:spPr>
           <a:xfrm>
-            <a:off x="3925824" y="3441802"/>
-            <a:ext cx="914400" cy="396240"/>
+            <a:off x="3889248" y="3441802"/>
+            <a:ext cx="987552" cy="396240"/>
           </a:xfrm>
           <a:prstGeom prst="rect">
             <a:avLst/>
@@ -11082,8 +11082,8 @@
         </p:nvSpPr>
         <p:spPr>
           <a:xfrm>
-            <a:off x="7348728" y="3441802"/>
-            <a:ext cx="914400" cy="396240"/>
+            <a:off x="7312152" y="3441802"/>
+            <a:ext cx="987552" cy="396240"/>
           </a:xfrm>
           <a:prstGeom prst="rect">
             <a:avLst/>
@@ -11236,8 +11236,8 @@
         </p:nvSpPr>
         <p:spPr>
           <a:xfrm>
-            <a:off x="10771632" y="3441802"/>
-            <a:ext cx="914400" cy="396240"/>
+            <a:off x="10735056" y="3441802"/>
+            <a:ext cx="987552" cy="396240"/>
           </a:xfrm>
           <a:prstGeom prst="rect">
             <a:avLst/>
@@ -11364,7 +11364,7 @@
               <a:buNone/>
             </a:pPr>
             <a:r>
-              <a:rPr lang="ko-KR" altLang="en-US" sz="2400" b="1" dirty="0">
+              <a:rPr lang="en-US" altLang="ko-KR" sz="2400" b="1" dirty="0">
                 <a:solidFill>
                   <a:srgbClr val="3D5A80"/>
                 </a:solidFill>
@@ -11450,7 +11450,7 @@
               <a:buNone/>
             </a:pPr>
             <a:r>
-              <a:rPr lang="ko-KR" altLang="en-US" sz="2400" b="1" dirty="0">
+              <a:rPr lang="en-US" altLang="ko-KR" sz="2400" b="1" dirty="0">
                 <a:solidFill>
                   <a:srgbClr val="3D5A80"/>
                 </a:solidFill>
@@ -11536,7 +11536,7 @@
               <a:buNone/>
             </a:pPr>
             <a:r>
-              <a:rPr lang="ko-KR" altLang="en-US" sz="2400" b="1" dirty="0">
+              <a:rPr lang="en-US" altLang="ko-KR" sz="2400" b="1" dirty="0">
                 <a:solidFill>
                   <a:srgbClr val="3D5A80"/>
                 </a:solidFill>
@@ -12815,7 +12815,7 @@
               <a:buNone/>
             </a:pPr>
             <a:r>
-              <a:rPr lang="ko-KR" altLang="en-US" sz="3000" b="1" dirty="0">
+              <a:rPr lang="en-US" altLang="ko-KR" sz="3000" b="1" dirty="0">
                 <a:solidFill>
                   <a:srgbClr val="1F2937"/>
                 </a:solidFill>
@@ -12901,7 +12901,7 @@
               <a:buNone/>
             </a:pPr>
             <a:r>
-              <a:rPr lang="ko-KR" altLang="en-US" sz="3000" b="1" dirty="0">
+              <a:rPr lang="en-US" altLang="ko-KR" sz="3000" b="1" dirty="0">
                 <a:solidFill>
                   <a:srgbClr val="1F2937"/>
                 </a:solidFill>
@@ -13497,7 +13497,7 @@
               <a:buNone/>
             </a:pPr>
             <a:r>
-              <a:rPr lang="ko-KR" altLang="en-US" sz="3000" dirty="0">
+              <a:rPr lang="en-US" altLang="ko-KR" sz="3000" dirty="0">
                 <a:solidFill>
                   <a:srgbClr val="1F2937"/>
                 </a:solidFill>
@@ -13514,7 +13514,7 @@
               <a:buNone/>
             </a:pPr>
             <a:r>
-              <a:rPr lang="ko-KR" altLang="en-US" sz="3000" dirty="0">
+              <a:rPr lang="en-US" altLang="ko-KR" sz="3000" dirty="0">
                 <a:solidFill>
                   <a:srgbClr val="1F2937"/>
                 </a:solidFill>
@@ -14826,7 +14826,7 @@
               <a:buNone/>
             </a:pPr>
             <a:r>
-              <a:rPr lang="ko-KR" altLang="en-US" sz="3000" dirty="0">
+              <a:rPr lang="en-US" altLang="ko-KR" sz="3000" dirty="0">
                 <a:solidFill>
                   <a:srgbClr val="1F2937"/>
                 </a:solidFill>
@@ -14910,7 +14910,7 @@
               <a:buNone/>
             </a:pPr>
             <a:r>
-              <a:rPr lang="ko-KR" altLang="en-US" sz="3000" dirty="0">
+              <a:rPr lang="en-US" altLang="ko-KR" sz="3000" dirty="0">
                 <a:solidFill>
                   <a:srgbClr val="1F2937"/>
                 </a:solidFill>
@@ -15011,7 +15011,7 @@
               <a:buNone/>
             </a:pPr>
             <a:r>
-              <a:rPr lang="ko-KR" altLang="en-US" sz="3000" dirty="0">
+              <a:rPr lang="en-US" altLang="ko-KR" sz="3000" dirty="0">
                 <a:solidFill>
                   <a:srgbClr val="1F2937"/>
                 </a:solidFill>
